--- a/solution_presentation.pptx
+++ b/solution_presentation.pptx
@@ -4186,7 +4186,7 @@
               </a:defRPr>
             </a:pPr>
             <a:r>
-              <a:t>• Adam, lr 2e-4, cosine decay, batch 12, FULL 128x128 images (not crops). 72 epochs, 3.6 h wall clock.</a:t>
+              <a:t>• Adam, lr 2e-4, cosine decay, batch 12, FULL 128x128 images (not crops). 110 epochs, 5.4 h wall clock.</a:t>
             </a:r>
           </a:p>
           <a:p>
@@ -4457,7 +4457,7 @@
               </a:defRPr>
             </a:pPr>
             <a:r>
-              <a:t>• RestoreNet (ours):        PSNR 28.465 dB   SSIM 0.7489   LPIPS 0.3413</a:t>
+              <a:t>• RestoreNet (ours):        PSNR 28.533 dB   SSIM 0.7514   LPIPS 0.3297</a:t>
             </a:r>
           </a:p>
           <a:p>
@@ -4472,7 +4472,7 @@
               </a:defRPr>
             </a:pPr>
             <a:r>
-              <a:t>• RestoreNet + 8x TTA:      PSNR TBD dB   SSIM TBD   LPIPS TBD</a:t>
+              <a:t>• RestoreNet + 8x TTA:      PSNR 28.569 dB   SSIM 0.7525   LPIPS 0.3337</a:t>
             </a:r>
           </a:p>
           <a:p>
@@ -4532,7 +4532,7 @@
               </a:defRPr>
             </a:pPr>
             <a:r>
-              <a:t>• Out-of-distribution probe (15 synthetic semiconductor-like patterns, absent from training): mean -0.85 dB vs bicubic, ahead on 5/15, best +7.18 dB.</a:t>
+              <a:t>• Out-of-distribution probe (15 synthetic semiconductor-like patterns, absent from training): mean +2.56 dB vs bicubic, ahead on 14/15, best +12.20 dB.</a:t>
             </a:r>
           </a:p>
         </p:txBody>

--- a/solution_presentation.pptx
+++ b/solution_presentation.pptx
@@ -4186,7 +4186,7 @@
               </a:defRPr>
             </a:pPr>
             <a:r>
-              <a:t>• Adam, lr 2e-4, cosine decay, batch 12, FULL 128x128 images (not crops). 110 epochs, 5.4 h wall clock.</a:t>
+              <a:t>• Adam, lr 2e-4, cosine decay, batch 12, FULL 128x128 images (not crops). 25 epochs, 1.4 h wall clock.</a:t>
             </a:r>
           </a:p>
           <a:p>
@@ -4457,7 +4457,7 @@
               </a:defRPr>
             </a:pPr>
             <a:r>
-              <a:t>• RestoreNet (ours):        PSNR 28.533 dB   SSIM 0.7514   LPIPS 0.3297</a:t>
+              <a:t>• RestoreNet (ours):        PSNR 28.378 dB   SSIM 0.7477   LPIPS 0.2158</a:t>
             </a:r>
           </a:p>
           <a:p>
@@ -4472,7 +4472,7 @@
               </a:defRPr>
             </a:pPr>
             <a:r>
-              <a:t>• RestoreNet + 8x TTA:      PSNR 28.569 dB   SSIM 0.7525   LPIPS 0.3337</a:t>
+              <a:t>• RestoreNet + 8x TTA:      PSNR 28.449 dB   SSIM 0.7511   LPIPS 0.2257</a:t>
             </a:r>
           </a:p>
           <a:p>
@@ -4852,7 +4852,7 @@
               </a:defRPr>
             </a:pPr>
             <a:r>
-              <a:t>• Stack: PyTorch. Trained on NVIDIA GeForce GTX 1650 (4 GB). No external datasets, no pretrained weights.</a:t>
+              <a:t>• Stack: PyTorch. Trained on NVIDIA GeForce GTX 1650. No external datasets, no pretrained weights.</a:t>
             </a:r>
           </a:p>
           <a:p>

--- a/solution_presentation.pptx
+++ b/solution_presentation.pptx
@@ -4852,7 +4852,7 @@
               </a:defRPr>
             </a:pPr>
             <a:r>
-              <a:t>• Stack: PyTorch. Trained on NVIDIA GeForce GTX 1650. No external datasets, no pretrained weights.</a:t>
+              <a:t>• Stack: PyTorch. Trained on NVIDIA GeForce GTX 1650 (4 GB). No external datasets, no pretrained weights.</a:t>
             </a:r>
           </a:p>
           <a:p>

--- a/solution_presentation.pptx
+++ b/solution_presentation.pptx
@@ -3182,7 +3182,7 @@
               </a:defRPr>
             </a:pPr>
             <a:r>
-              <a:t>Team: PlaceholderTeam     |     COLLEGE NAME</a:t>
+              <a:t>Team: Web Shooters     |     Saintgits College of Engineering</a:t>
             </a:r>
           </a:p>
           <a:p>
@@ -3194,7 +3194,7 @@
               </a:defRPr>
             </a:pPr>
             <a:r>
-              <a:t>Members: MEMBER 1 (role), MEMBER 2 (role)</a:t>
+              <a:t>Members: Bevin Punnoose Jacob (Team Lead, ML Engineering); S Govind (Data Analysis &amp; Evaluation); Renil James (Model Architecture); Antony Thomas (Documentation &amp; Results)</a:t>
             </a:r>
           </a:p>
           <a:p>
@@ -3206,7 +3206,7 @@
               </a:defRPr>
             </a:pPr>
             <a:r>
-              <a:t>Contact: EMAIL / PHONE</a:t>
+              <a:t>Contact: bevjacob005@gmail.com  |  +91 XXXXX XXXXX</a:t>
             </a:r>
           </a:p>
           <a:p>
@@ -4852,7 +4852,7 @@
               </a:defRPr>
             </a:pPr>
             <a:r>
-              <a:t>• Stack: PyTorch. Trained on NVIDIA GeForce GTX 1650 (4 GB). No external datasets, no pretrained weights.</a:t>
+              <a:t>• Stack: PyTorch. Trained on NVIDIA GeForce GTX 1650 (4 GiB). No external datasets, no pretrained weights.</a:t>
             </a:r>
           </a:p>
           <a:p>

--- a/solution_presentation.pptx
+++ b/solution_presentation.pptx
@@ -3194,7 +3194,7 @@
               </a:defRPr>
             </a:pPr>
             <a:r>
-              <a:t>Members: Bevin Punnoose Jacob (Team Lead, ML Engineering); S Govind (Data Analysis &amp; Evaluation); Renil James (Model Architecture); Antony Thomas (Documentation &amp; Results)</a:t>
+              <a:t>Members: S Govind (Team Lead); Bevin Punnoose Jacob (ML Engineering &amp; Implementation); Renil James (Data Analysis &amp; Evaluation); Antony Thomas (Documentation &amp; Results)</a:t>
             </a:r>
           </a:p>
           <a:p>
@@ -3206,7 +3206,7 @@
               </a:defRPr>
             </a:pPr>
             <a:r>
-              <a:t>Contact: bevjacob005@gmail.com  |  +91 XXXXX XXXXX</a:t>
+              <a:t>Contact: govindinferno@gmail.com</a:t>
             </a:r>
           </a:p>
           <a:p>

--- a/solution_presentation.pptx
+++ b/solution_presentation.pptx
@@ -3194,7 +3194,7 @@
               </a:defRPr>
             </a:pPr>
             <a:r>
-              <a:t>Members: S Govind (Team Lead); Bevin Punnoose Jacob (ML Engineering &amp; Implementation); Renil James (Data Analysis &amp; Evaluation); Antony Thomas (Documentation &amp; Results)</a:t>
+              <a:t>Members: S Govind (Team Lead, Data Analysis &amp; Evaluation); Bevin Punnoose Jacob (ML Engineering &amp; Implementation); Renil James (Benchmarking &amp; Validation); Antony Thomas (Documentation &amp; Results)</a:t>
             </a:r>
           </a:p>
           <a:p>
@@ -3206,7 +3206,7 @@
               </a:defRPr>
             </a:pPr>
             <a:r>
-              <a:t>Contact: govindinferno@gmail.com</a:t>
+              <a:t>Contact: govindinferno@gmail.com  |  +91 80895 83726</a:t>
             </a:r>
           </a:p>
           <a:p>

--- a/solution_presentation.pptx
+++ b/solution_presentation.pptx
@@ -4004,7 +4004,7 @@
         <p:spPr>
           <a:xfrm>
             <a:off x="4080053" y="2270455"/>
-            <a:ext cx="1089965" cy="200254"/>
+            <a:ext cx="4023360" cy="200254"/>
           </a:xfrm>
           <a:prstGeom prst="rect">
             <a:avLst/>
@@ -4069,7 +4069,7 @@
                 </a:solidFill>
                 <a:latin typeface="Poppins"/>
               </a:rPr>
-              <a:t>3rd Year</a:t>
+              <a:t>4th Year</a:t>
             </a:r>
             <a:endParaRPr lang="en-US" sz="1100" dirty="0"/>
           </a:p>
@@ -4084,7 +4084,7 @@
         <p:spPr>
           <a:xfrm>
             <a:off x="4080053" y="2725826"/>
-            <a:ext cx="1089965" cy="200254"/>
+            <a:ext cx="4023360" cy="200254"/>
           </a:xfrm>
           <a:prstGeom prst="rect">
             <a:avLst/>
@@ -4149,7 +4149,7 @@
                 </a:solidFill>
                 <a:latin typeface="Poppins"/>
               </a:rPr>
-              <a:t>3rd Year</a:t>
+              <a:t>4th Year</a:t>
             </a:r>
             <a:endParaRPr lang="en-US" sz="1100" dirty="0"/>
           </a:p>
@@ -4164,7 +4164,7 @@
         <p:spPr>
           <a:xfrm>
             <a:off x="4080053" y="3181198"/>
-            <a:ext cx="1089965" cy="200254"/>
+            <a:ext cx="4023360" cy="200254"/>
           </a:xfrm>
           <a:prstGeom prst="rect">
             <a:avLst/>
@@ -4229,7 +4229,7 @@
                 </a:solidFill>
                 <a:latin typeface="Poppins"/>
               </a:rPr>
-              <a:t>3rd Year</a:t>
+              <a:t>4th Year</a:t>
             </a:r>
             <a:endParaRPr lang="en-US" sz="1100" dirty="0"/>
           </a:p>
@@ -4244,7 +4244,7 @@
         <p:spPr>
           <a:xfrm>
             <a:off x="4080053" y="3636569"/>
-            <a:ext cx="1089965" cy="200254"/>
+            <a:ext cx="4023360" cy="200254"/>
           </a:xfrm>
           <a:prstGeom prst="rect">
             <a:avLst/>
@@ -4309,7 +4309,7 @@
                 </a:solidFill>
                 <a:latin typeface="Poppins"/>
               </a:rPr>
-              <a:t>3rd Year</a:t>
+              <a:t>4th Year</a:t>
             </a:r>
             <a:endParaRPr lang="en-US" sz="1100" dirty="0"/>
           </a:p>
@@ -4324,7 +4324,7 @@
         <p:spPr>
           <a:xfrm>
             <a:off x="923544" y="5152644"/>
-            <a:ext cx="2057400" cy="219456"/>
+            <a:ext cx="9144000" cy="219456"/>
           </a:xfrm>
           <a:prstGeom prst="rect">
             <a:avLst/>
@@ -4404,7 +4404,7 @@
         <p:spPr>
           <a:xfrm>
             <a:off x="6344107" y="6038698"/>
-            <a:ext cx="1886407" cy="219456"/>
+            <a:ext cx="4754880" cy="219456"/>
           </a:xfrm>
           <a:prstGeom prst="rect">
             <a:avLst/>
@@ -4923,8 +4923,8 @@
         </p:nvSpPr>
         <p:spPr>
           <a:xfrm>
-            <a:off x="961949" y="3768242"/>
-            <a:ext cx="10267798" cy="1276502"/>
+            <a:off x="960120" y="3703320"/>
+            <a:ext cx="10268712" cy="2697480"/>
           </a:xfrm>
           <a:prstGeom prst="roundRect">
             <a:avLst>
@@ -4959,7 +4959,7 @@
         </p:nvSpPr>
         <p:spPr>
           <a:xfrm>
-            <a:off x="1200607" y="4006901"/>
+            <a:off x="1197864" y="3822191"/>
             <a:ext cx="1690726" cy="191110"/>
           </a:xfrm>
           <a:prstGeom prst="rect">
@@ -4998,8 +4998,8 @@
         </p:nvSpPr>
         <p:spPr>
           <a:xfrm>
-            <a:off x="1200607" y="4283050"/>
-            <a:ext cx="8968435" cy="505663"/>
+            <a:off x="1197864" y="4133087"/>
+            <a:ext cx="9784080" cy="2194560"/>
           </a:xfrm>
           <a:prstGeom prst="rect">
             <a:avLst/>
@@ -5742,8 +5742,8 @@
         </p:nvSpPr>
         <p:spPr>
           <a:xfrm>
-            <a:off x="961949" y="4060850"/>
-            <a:ext cx="10267798" cy="895198"/>
+            <a:off x="960120" y="3703320"/>
+            <a:ext cx="10268712" cy="1298448"/>
           </a:xfrm>
           <a:prstGeom prst="roundRect">
             <a:avLst>
@@ -5778,7 +5778,7 @@
         </p:nvSpPr>
         <p:spPr>
           <a:xfrm>
-            <a:off x="1162202" y="4261104"/>
+            <a:off x="1161288" y="3822191"/>
             <a:ext cx="1996135" cy="191110"/>
           </a:xfrm>
           <a:prstGeom prst="rect">
@@ -5817,8 +5817,8 @@
         </p:nvSpPr>
         <p:spPr>
           <a:xfrm>
-            <a:off x="1162202" y="4528109"/>
-            <a:ext cx="7677302" cy="219456"/>
+            <a:off x="1161288" y="4114800"/>
+            <a:ext cx="9784080" cy="822960"/>
           </a:xfrm>
           <a:prstGeom prst="rect">
             <a:avLst/>
@@ -5873,8 +5873,8 @@
         </p:nvSpPr>
         <p:spPr>
           <a:xfrm>
-            <a:off x="961949" y="5108753"/>
-            <a:ext cx="10267798" cy="895198"/>
+            <a:off x="960120" y="5120640"/>
+            <a:ext cx="10268712" cy="1298448"/>
           </a:xfrm>
           <a:prstGeom prst="roundRect">
             <a:avLst>
@@ -5909,7 +5909,7 @@
         </p:nvSpPr>
         <p:spPr>
           <a:xfrm>
-            <a:off x="1162202" y="5309006"/>
+            <a:off x="1161288" y="5239512"/>
             <a:ext cx="1548079" cy="191110"/>
           </a:xfrm>
           <a:prstGeom prst="rect">
@@ -5948,8 +5948,8 @@
         </p:nvSpPr>
         <p:spPr>
           <a:xfrm>
-            <a:off x="1162202" y="5575097"/>
-            <a:ext cx="8458200" cy="219456"/>
+            <a:off x="1161288" y="5532120"/>
+            <a:ext cx="9784080" cy="822960"/>
           </a:xfrm>
           <a:prstGeom prst="rect">
             <a:avLst/>
@@ -6625,8 +6625,8 @@
         </p:nvSpPr>
         <p:spPr>
           <a:xfrm>
-            <a:off x="961949" y="4134002"/>
-            <a:ext cx="10267798" cy="1276502"/>
+            <a:off x="960120" y="3703320"/>
+            <a:ext cx="10268712" cy="2697480"/>
           </a:xfrm>
           <a:prstGeom prst="roundRect">
             <a:avLst>
@@ -6661,7 +6661,7 @@
         </p:nvSpPr>
         <p:spPr>
           <a:xfrm>
-            <a:off x="1200607" y="4372661"/>
+            <a:off x="1197864" y="3822191"/>
             <a:ext cx="1367028" cy="191110"/>
           </a:xfrm>
           <a:prstGeom prst="rect">
@@ -6700,8 +6700,8 @@
         </p:nvSpPr>
         <p:spPr>
           <a:xfrm>
-            <a:off x="1200607" y="4648810"/>
-            <a:ext cx="8996782" cy="505663"/>
+            <a:off x="1197864" y="4133087"/>
+            <a:ext cx="9784080" cy="2194560"/>
           </a:xfrm>
           <a:prstGeom prst="rect">
             <a:avLst/>
@@ -6807,7 +6807,7 @@
                 </a:solidFill>
                 <a:latin typeface="Poppins"/>
               </a:rPr>
-              <a:t>• STACK: PyTorch 2.9.1+cu128, trained on NVIDIA GeForce GTX 1650 (4 GiB) — base 110 ep/5.4 h + finetune_ood 16 ep/2.0 h + perceptual 25 ep/1.4 h.</a:t>
+              <a:t>• STACK: PyTorch 2.9.1+cu128, trained on NVIDIA GeForce GTX 1650 (4 GiB) — base 110 ep/5.4 h + perceptual 25 ep/1.4 h.</a:t>
             </a:r>
           </a:p>
           <a:p>
@@ -7430,8 +7430,8 @@
         </p:nvSpPr>
         <p:spPr>
           <a:xfrm>
-            <a:off x="961949" y="3845052"/>
-            <a:ext cx="5020056" cy="1429207"/>
+            <a:off x="960120" y="3703320"/>
+            <a:ext cx="5020056" cy="2697480"/>
           </a:xfrm>
           <a:prstGeom prst="roundRect">
             <a:avLst>
@@ -7466,7 +7466,7 @@
         </p:nvSpPr>
         <p:spPr>
           <a:xfrm>
-            <a:off x="1200607" y="4082796"/>
+            <a:off x="1197864" y="3822191"/>
             <a:ext cx="1271930" cy="191110"/>
           </a:xfrm>
           <a:prstGeom prst="rect">
@@ -7505,8 +7505,8 @@
         </p:nvSpPr>
         <p:spPr>
           <a:xfrm>
-            <a:off x="1200607" y="4349801"/>
-            <a:ext cx="4429354" cy="448056"/>
+            <a:off x="1197864" y="4133087"/>
+            <a:ext cx="4553712" cy="2194560"/>
           </a:xfrm>
           <a:prstGeom prst="rect">
             <a:avLst/>
@@ -7577,8 +7577,8 @@
         </p:nvSpPr>
         <p:spPr>
           <a:xfrm>
-            <a:off x="6210605" y="3845052"/>
-            <a:ext cx="5020056" cy="1429207"/>
+            <a:off x="6208776" y="3703320"/>
+            <a:ext cx="5020056" cy="2697480"/>
           </a:xfrm>
           <a:prstGeom prst="roundRect">
             <a:avLst>
@@ -7613,7 +7613,7 @@
         </p:nvSpPr>
         <p:spPr>
           <a:xfrm>
-            <a:off x="6448349" y="4082796"/>
+            <a:off x="6446520" y="3822191"/>
             <a:ext cx="1901038" cy="191110"/>
           </a:xfrm>
           <a:prstGeom prst="rect">
@@ -7652,8 +7652,8 @@
         </p:nvSpPr>
         <p:spPr>
           <a:xfrm>
-            <a:off x="6448349" y="4349801"/>
-            <a:ext cx="4239158" cy="676656"/>
+            <a:off x="6446520" y="4133087"/>
+            <a:ext cx="4553712" cy="2194560"/>
           </a:xfrm>
           <a:prstGeom prst="rect">
             <a:avLst/>
@@ -8318,8 +8318,8 @@
         </p:nvSpPr>
         <p:spPr>
           <a:xfrm>
-            <a:off x="961949" y="4210812"/>
-            <a:ext cx="5020056" cy="1200607"/>
+            <a:off x="960120" y="3675887"/>
+            <a:ext cx="5020056" cy="1691640"/>
           </a:xfrm>
           <a:prstGeom prst="roundRect">
             <a:avLst>
@@ -8361,7 +8361,7 @@
         </p:blipFill>
         <p:spPr>
           <a:xfrm>
-            <a:off x="1200607" y="4486961"/>
+            <a:off x="1200607" y="3813048"/>
             <a:ext cx="152705" cy="152705"/>
           </a:xfrm>
           <a:prstGeom prst="rect">
@@ -8377,7 +8377,7 @@
         </p:nvSpPr>
         <p:spPr>
           <a:xfrm>
-            <a:off x="1466698" y="4448556"/>
+            <a:off x="1463040" y="3776472"/>
             <a:ext cx="1324051" cy="219456"/>
           </a:xfrm>
           <a:prstGeom prst="rect">
@@ -8416,8 +8416,8 @@
         </p:nvSpPr>
         <p:spPr>
           <a:xfrm>
-            <a:off x="1200607" y="4791456"/>
-            <a:ext cx="4148633" cy="381305"/>
+            <a:off x="1197864" y="4087368"/>
+            <a:ext cx="4553712" cy="1188720"/>
           </a:xfrm>
           <a:prstGeom prst="rect">
             <a:avLst/>
@@ -8504,8 +8504,8 @@
         </p:nvSpPr>
         <p:spPr>
           <a:xfrm>
-            <a:off x="6210605" y="4210812"/>
-            <a:ext cx="5020056" cy="1200607"/>
+            <a:off x="6208776" y="3675887"/>
+            <a:ext cx="5020056" cy="1691640"/>
           </a:xfrm>
           <a:prstGeom prst="roundRect">
             <a:avLst>
@@ -8547,7 +8547,7 @@
         </p:blipFill>
         <p:spPr>
           <a:xfrm>
-            <a:off x="6448349" y="4486961"/>
+            <a:off x="6448349" y="3813048"/>
             <a:ext cx="171907" cy="152705"/>
           </a:xfrm>
           <a:prstGeom prst="rect">
@@ -8563,7 +8563,7 @@
         </p:nvSpPr>
         <p:spPr>
           <a:xfrm>
-            <a:off x="6734556" y="4448556"/>
+            <a:off x="6739128" y="3776472"/>
             <a:ext cx="1924812" cy="219456"/>
           </a:xfrm>
           <a:prstGeom prst="rect">
@@ -8602,8 +8602,8 @@
         </p:nvSpPr>
         <p:spPr>
           <a:xfrm>
-            <a:off x="6448349" y="4791456"/>
-            <a:ext cx="3986784" cy="381305"/>
+            <a:off x="6446520" y="4087368"/>
+            <a:ext cx="4553712" cy="1188720"/>
           </a:xfrm>
           <a:prstGeom prst="rect">
             <a:avLst/>
@@ -8792,7 +8792,7 @@
         </p:blipFill>
         <p:spPr>
           <a:xfrm>
-            <a:off x="1344168" y="5504688"/>
+            <a:off x="1344168" y="5486400"/>
             <a:ext cx="9509760" cy="1066246"/>
           </a:xfrm>
           <a:prstGeom prst="rect">
@@ -9647,63 +9647,15 @@
               <a:buNone/>
             </a:pPr>
             <a:r>
-              <a:rPr sz="1000">
+              <a:rPr sz="1200">
                 <a:solidFill>
                   <a:srgbClr val="D1D5DB"/>
                 </a:solidFill>
                 <a:latin typeface="Poppins"/>
               </a:rPr>
-              <a:t>References — Lim et al., EDSR, CVPRW 2017 · Shi et al., PixelShuffle, CVPR 2016 ·</a:t>
+              <a:t>Not submitted — full results, figures and code are in the repository.</a:t>
             </a:r>
             <a:endParaRPr lang="en-US" sz="1300" dirty="0"/>
-          </a:p>
-          <a:p>
-            <a:pPr>
-              <a:spcAft>
-                <a:spcPts val="300"/>
-              </a:spcAft>
-            </a:pPr>
-            <a:r>
-              <a:rPr sz="1000">
-                <a:solidFill>
-                  <a:srgbClr val="D1D5DB"/>
-                </a:solidFill>
-                <a:latin typeface="Poppins"/>
-              </a:rPr>
-              <a:t>Zhang et al., LPIPS, CVPR 2018 · Zhai et al., IEEE Access 11:21049, 2023 ·</a:t>
-            </a:r>
-          </a:p>
-          <a:p>
-            <a:pPr>
-              <a:spcAft>
-                <a:spcPts val="300"/>
-              </a:spcAft>
-            </a:pPr>
-            <a:r>
-              <a:rPr sz="1000">
-                <a:solidFill>
-                  <a:srgbClr val="D1D5DB"/>
-                </a:solidFill>
-                <a:latin typeface="Poppins"/>
-              </a:rPr>
-              <a:t>Terven et al., Artif Intell Rev 58:195, 2025 · Monga et al., IEEE SPM 38(2), 2021.</a:t>
-            </a:r>
-          </a:p>
-          <a:p>
-            <a:pPr>
-              <a:spcAft>
-                <a:spcPts val="300"/>
-              </a:spcAft>
-            </a:pPr>
-            <a:r>
-              <a:rPr sz="1000">
-                <a:solidFill>
-                  <a:srgbClr val="D1D5DB"/>
-                </a:solidFill>
-                <a:latin typeface="Poppins"/>
-              </a:rPr>
-              <a:t>No external datasets or pretrained weights were used for the model.</a:t>
-            </a:r>
           </a:p>
         </p:txBody>
       </p:sp>
@@ -9817,6 +9769,74 @@
           </a:prstGeom>
         </p:spPr>
       </p:pic>
+      <p:sp>
+        <p:nvSpPr>
+          <p:cNvPr id="32" name="TextBox 31"/>
+          <p:cNvSpPr txBox="1"/>
+          <p:nvPr/>
+        </p:nvSpPr>
+        <p:spPr>
+          <a:xfrm>
+            <a:off x="1051560" y="5897880"/>
+            <a:ext cx="10058400" cy="685800"/>
+          </a:xfrm>
+          <a:prstGeom prst="rect">
+            <a:avLst/>
+          </a:prstGeom>
+          <a:noFill/>
+        </p:spPr>
+        <p:txBody>
+          <a:bodyPr wrap="square">
+            <a:spAutoFit/>
+          </a:bodyPr>
+          <a:lstStyle/>
+          <a:p>
+            <a:pPr>
+              <a:spcAft>
+                <a:spcPts val="200"/>
+              </a:spcAft>
+            </a:pPr>
+            <a:r>
+              <a:rPr sz="1100" b="1">
+                <a:solidFill>
+                  <a:srgbClr val="A8E63A"/>
+                </a:solidFill>
+              </a:rPr>
+              <a:t>REFERENCES</a:t>
+            </a:r>
+          </a:p>
+          <a:p>
+            <a:pPr>
+              <a:spcAft>
+                <a:spcPts val="200"/>
+              </a:spcAft>
+            </a:pPr>
+            <a:r>
+              <a:rPr sz="900" b="0">
+                <a:solidFill>
+                  <a:srgbClr val="D5DCEA"/>
+                </a:solidFill>
+              </a:rPr>
+              <a:t>Lim et al., EDSR, CVPRW 2017 · Shi et al., PixelShuffle, CVPR 2016 · Zhang et al., LPIPS, CVPR 2018 · Zhai et al., IEEE Access 11:21049, 2023 · Terven et al., Artif Intell Rev 58:195, 2025 · Monga et al., IEEE SPM 38(2), 2021.</a:t>
+            </a:r>
+          </a:p>
+          <a:p>
+            <a:pPr>
+              <a:spcAft>
+                <a:spcPts val="200"/>
+              </a:spcAft>
+            </a:pPr>
+            <a:r>
+              <a:rPr sz="900" b="0">
+                <a:solidFill>
+                  <a:srgbClr val="D5DCEA"/>
+                </a:solidFill>
+              </a:rPr>
+              <a:t>No external datasets or pretrained weights were used for the model.</a:t>
+            </a:r>
+          </a:p>
+        </p:txBody>
+      </p:sp>
     </p:spTree>
   </p:cSld>
   <p:clrMapOvr>

--- a/solution_presentation.pptx
+++ b/solution_presentation.pptx
@@ -8475,7 +8475,7 @@
                 </a:solidFill>
                 <a:latin typeface="Poppins"/>
               </a:rPr>
-              <a:t>• LPIPS 0.4369 → 0.2158 (lower better)</a:t>
+              <a:t>• LPIPS 0.4369 → 0.2158</a:t>
             </a:r>
           </a:p>
           <a:p>

--- a/solution_presentation.pptx
+++ b/solution_presentation.pptx
@@ -5974,7 +5974,7 @@
                 </a:solidFill>
                 <a:latin typeface="Poppins"/>
               </a:rPr>
-              <a:t>• 1.37M-parameter residual CNN; all work at low resolution, one PixelShuffle at the end — 4× cheaper.</a:t>
+              <a:t>• 4.4M-parameter residual CNN; all work at low resolution, one PixelShuffle at the end — 4× cheaper.</a:t>
             </a:r>
             <a:endParaRPr lang="en-US" sz="1200" dirty="0"/>
           </a:p>
@@ -6775,7 +6775,7 @@
                 </a:solidFill>
                 <a:latin typeface="Poppins"/>
               </a:rPr>
-              <a:t>• MODEL: 16 residual blocks × 64 ch → PixelShuffle ×2. No global skip from the noisy input. Output clamped to [0,1].</a:t>
+              <a:t>• MODEL: 24 residual blocks × 96 ch → PixelShuffle ×2. No global skip from the noisy input. Output clamped to [0,1].</a:t>
             </a:r>
           </a:p>
           <a:p>
@@ -6807,7 +6807,7 @@
                 </a:solidFill>
                 <a:latin typeface="Poppins"/>
               </a:rPr>
-              <a:t>• STACK: PyTorch 2.9.1+cu128, trained on NVIDIA GeForce GTX 1650 (4 GiB) — base 110 ep/5.4 h + perceptual 25 ep/1.4 h.</a:t>
+              <a:t>• STACK: PyTorch 2.9.1+cu128 — large_ft_perceptual 25 ep/3.5 h + large 147 ep/6.1 h on RTX 4050 (base) and GTX 1650 (fine-tune).</a:t>
             </a:r>
           </a:p>
           <a:p>
@@ -6823,7 +6823,7 @@
                 </a:solidFill>
                 <a:latin typeface="Poppins"/>
               </a:rPr>
-              <a:t>• FEASIBILITY: 16 MB checkpoint, 31.5 ms/image end-to-end; runs unchanged on CPU or any NVIDIA GPU.</a:t>
+              <a:t>• FEASIBILITY: 50 MB checkpoint, 101 ms/image end-to-end on a GTX 1650; runs unchanged on CPU or any NVIDIA GPU.</a:t>
             </a:r>
           </a:p>
         </p:txBody>
@@ -7695,7 +7695,7 @@
                 </a:solidFill>
                 <a:latin typeface="Poppins"/>
               </a:rPr>
-              <a:t>• Deliberately small (1.37M params): KLA scores throughput, and oversized models lose it.</a:t>
+              <a:t>• Compact by design (4.4M params, 50 MB): all computation at low resolution, so throughput stays high.</a:t>
             </a:r>
           </a:p>
           <a:p>
@@ -8442,7 +8442,7 @@
                 </a:solidFill>
                 <a:latin typeface="Poppins"/>
               </a:rPr>
-              <a:t>• PSNR 23.23 → 28.38 dB</a:t>
+              <a:t>• PSNR 23.23 → 28.68 dB</a:t>
             </a:r>
             <a:endParaRPr lang="en-US" sz="1000" dirty="0"/>
           </a:p>
@@ -8459,7 +8459,7 @@
                 </a:solidFill>
                 <a:latin typeface="Poppins"/>
               </a:rPr>
-              <a:t>• SSIM 0.5395 → 0.7477</a:t>
+              <a:t>• SSIM 0.5395 → 0.7543</a:t>
             </a:r>
           </a:p>
           <a:p>
@@ -8475,7 +8475,7 @@
                 </a:solidFill>
                 <a:latin typeface="Poppins"/>
               </a:rPr>
-              <a:t>• LPIPS 0.4369 → 0.2158</a:t>
+              <a:t>• LPIPS 0.4369 → 0.1811</a:t>
             </a:r>
           </a:p>
           <a:p>
@@ -8491,7 +8491,7 @@
                 </a:solidFill>
                 <a:latin typeface="Poppins"/>
               </a:rPr>
-              <a:t>• Untrained control 11.70 dB — the metric can fail.</a:t>
+              <a:t>• Untrained control 10.35 dB — the metric can fail.</a:t>
             </a:r>
           </a:p>
         </p:txBody>
@@ -8628,7 +8628,7 @@
                 </a:solidFill>
                 <a:latin typeface="Poppins"/>
               </a:rPr>
-              <a:t>• +5.14 dB PSNR, +0.2083 SSIM, 0.2211 better LPIPS</a:t>
+              <a:t>• +5.44 dB PSNR, +0.2148 SSIM, 0.2558 better LPIPS</a:t>
             </a:r>
             <a:endParaRPr lang="en-US" sz="1000" dirty="0"/>
           </a:p>
@@ -8645,7 +8645,7 @@
                 </a:solidFill>
                 <a:latin typeface="Poppins"/>
               </a:rPr>
-              <a:t>• 31.5 ms/image end-to-end (read → preprocess → transfer → model → save)</a:t>
+              <a:t>• 101 ms/image end-to-end (read → preprocess → transfer → model → save)</a:t>
             </a:r>
           </a:p>
           <a:p>
@@ -8661,7 +8661,7 @@
                 </a:solidFill>
                 <a:latin typeface="Poppins"/>
               </a:rPr>
-              <a:t>• Unseen semiconductor-like structure: +2.56 dB mean, ahead on 14/15 patterns</a:t>
+              <a:t>• Unseen semiconductor-like structure: +2.32 dB mean, ahead on 13/15 patterns</a:t>
             </a:r>
           </a:p>
         </p:txBody>

--- a/solution_presentation.pptx
+++ b/solution_presentation.pptx
@@ -5728,7 +5728,7 @@
                 </a:solidFill>
                 <a:latin typeface="Poppins"/>
               </a:rPr>
-              <a:t>One small fully-convolutional network denoises and 2× super-resolves in a single pass, built on a degradation model recovered from the data rather than guessed.</a:t>
+              <a:t>One compact fully-convolutional network denoises and 2× super-resolves in a single pass, built on a degradation model recovered from the data rather than guessed.</a:t>
             </a:r>
             <a:endParaRPr lang="en-US" sz="1600" dirty="0"/>
           </a:p>
@@ -6791,7 +6791,7 @@
                 </a:solidFill>
                 <a:latin typeface="Poppins"/>
               </a:rPr>
-              <a:t>• LOSS: Charbonnier blended with an LPIPS perceptual term by weight interpolation of two checkpoints.</a:t>
+              <a:t>• LOSS: Charbonnier (smooth L1) for pixel accuracy, then a fine-tune adding a frozen-AlexNet LPIPS term for perceptual quality.</a:t>
             </a:r>
           </a:p>
           <a:p>
@@ -6807,7 +6807,7 @@
                 </a:solidFill>
                 <a:latin typeface="Poppins"/>
               </a:rPr>
-              <a:t>• STACK: PyTorch 2.9.1+cu128 — large_ft_perceptual 25 ep/3.5 h + large 147 ep/6.1 h on RTX 4050 (base) and GTX 1650 (fine-tune).</a:t>
+              <a:t>• STACK: PyTorch 2.9.1+cu128 — large_ft_perceptual 25 ep/3.5 h + large 147 ep/6.1 h + large_perc_long 40 ep/6.7 h on RTX 4050 (base) and GTX 1650 (fine-tune).</a:t>
             </a:r>
           </a:p>
           <a:p>
@@ -7564,7 +7564,7 @@
                 </a:solidFill>
                 <a:latin typeface="Poppins"/>
               </a:rPr>
-              <a:t>• Perceptual/pixel weight interpolation — 93% of the LPIPS gain for 2.9% of the PSNR gain, zero extra training.</a:t>
+              <a:t>• Perceptual fine-tune of a pixel-trained network: LPIPS 0.3099 → 0.1811, a 42% cut, for 0.34 dB of PSNR. The interpolation curve between the two was measured and showed no blend was needed.</a:t>
             </a:r>
           </a:p>
         </p:txBody>
@@ -7711,7 +7711,7 @@
                 </a:solidFill>
                 <a:latin typeface="Poppins"/>
               </a:rPr>
-              <a:t>• Ideas tested and REJECTED on evidence: 8× TTA (worsened LPIPS), synthetic-pattern training (−0.22 dB).</a:t>
+              <a:t>• Three ideas tested and REJECTED on evidence: 8× TTA (worse LPIPS, 3 checkpoints), synthetic-pattern training (−0.22 dB), longer perceptual schedule (won the val split, lost 0.57 dB out-of-distribution).</a:t>
             </a:r>
           </a:p>
         </p:txBody>
